--- a/Amazing Grace.pptx
+++ b/Amazing Grace.pptx
@@ -251,7 +251,7 @@
           <a:p>
             <a:fld id="{E759A0DE-F190-5444-87AC-4719D5F20D15}" type="datetimeFigureOut">
               <a:rPr lang="en-US" smtClean="0"/>
-              <a:t>7/4/26</a:t>
+              <a:t>8/1/26</a:t>
             </a:fld>
             <a:endParaRPr lang="en-US"/>
           </a:p>
@@ -421,7 +421,7 @@
           <a:p>
             <a:fld id="{E759A0DE-F190-5444-87AC-4719D5F20D15}" type="datetimeFigureOut">
               <a:rPr lang="en-US" smtClean="0"/>
-              <a:t>7/4/26</a:t>
+              <a:t>8/1/26</a:t>
             </a:fld>
             <a:endParaRPr lang="en-US"/>
           </a:p>
@@ -601,7 +601,7 @@
           <a:p>
             <a:fld id="{E759A0DE-F190-5444-87AC-4719D5F20D15}" type="datetimeFigureOut">
               <a:rPr lang="en-US" smtClean="0"/>
-              <a:t>7/4/26</a:t>
+              <a:t>8/1/26</a:t>
             </a:fld>
             <a:endParaRPr lang="en-US"/>
           </a:p>
@@ -771,7 +771,7 @@
           <a:p>
             <a:fld id="{E759A0DE-F190-5444-87AC-4719D5F20D15}" type="datetimeFigureOut">
               <a:rPr lang="en-US" smtClean="0"/>
-              <a:t>7/4/26</a:t>
+              <a:t>8/1/26</a:t>
             </a:fld>
             <a:endParaRPr lang="en-US"/>
           </a:p>
@@ -1017,7 +1017,7 @@
           <a:p>
             <a:fld id="{E759A0DE-F190-5444-87AC-4719D5F20D15}" type="datetimeFigureOut">
               <a:rPr lang="en-US" smtClean="0"/>
-              <a:t>7/4/26</a:t>
+              <a:t>8/1/26</a:t>
             </a:fld>
             <a:endParaRPr lang="en-US"/>
           </a:p>
@@ -1249,7 +1249,7 @@
           <a:p>
             <a:fld id="{E759A0DE-F190-5444-87AC-4719D5F20D15}" type="datetimeFigureOut">
               <a:rPr lang="en-US" smtClean="0"/>
-              <a:t>7/4/26</a:t>
+              <a:t>8/1/26</a:t>
             </a:fld>
             <a:endParaRPr lang="en-US"/>
           </a:p>
@@ -1616,7 +1616,7 @@
           <a:p>
             <a:fld id="{E759A0DE-F190-5444-87AC-4719D5F20D15}" type="datetimeFigureOut">
               <a:rPr lang="en-US" smtClean="0"/>
-              <a:t>7/4/26</a:t>
+              <a:t>8/1/26</a:t>
             </a:fld>
             <a:endParaRPr lang="en-US"/>
           </a:p>
@@ -1734,7 +1734,7 @@
           <a:p>
             <a:fld id="{E759A0DE-F190-5444-87AC-4719D5F20D15}" type="datetimeFigureOut">
               <a:rPr lang="en-US" smtClean="0"/>
-              <a:t>7/4/26</a:t>
+              <a:t>8/1/26</a:t>
             </a:fld>
             <a:endParaRPr lang="en-US"/>
           </a:p>
@@ -1829,7 +1829,7 @@
           <a:p>
             <a:fld id="{E759A0DE-F190-5444-87AC-4719D5F20D15}" type="datetimeFigureOut">
               <a:rPr lang="en-US" smtClean="0"/>
-              <a:t>7/4/26</a:t>
+              <a:t>8/1/26</a:t>
             </a:fld>
             <a:endParaRPr lang="en-US"/>
           </a:p>
@@ -2106,7 +2106,7 @@
           <a:p>
             <a:fld id="{E759A0DE-F190-5444-87AC-4719D5F20D15}" type="datetimeFigureOut">
               <a:rPr lang="en-US" smtClean="0"/>
-              <a:t>7/4/26</a:t>
+              <a:t>8/1/26</a:t>
             </a:fld>
             <a:endParaRPr lang="en-US"/>
           </a:p>
@@ -2363,7 +2363,7 @@
           <a:p>
             <a:fld id="{E759A0DE-F190-5444-87AC-4719D5F20D15}" type="datetimeFigureOut">
               <a:rPr lang="en-US" smtClean="0"/>
-              <a:t>7/4/26</a:t>
+              <a:t>8/1/26</a:t>
             </a:fld>
             <a:endParaRPr lang="en-US"/>
           </a:p>
@@ -2576,7 +2576,7 @@
           <a:p>
             <a:fld id="{E759A0DE-F190-5444-87AC-4719D5F20D15}" type="datetimeFigureOut">
               <a:rPr lang="en-US" smtClean="0"/>
-              <a:t>7/4/26</a:t>
+              <a:t>8/1/26</a:t>
             </a:fld>
             <a:endParaRPr lang="en-US"/>
           </a:p>
@@ -3037,6 +3037,68 @@
           </a:p>
         </p:txBody>
       </p:sp>
+      <p:sp>
+        <p:nvSpPr>
+          <p:cNvPr id="2" name="TextBox 1">
+            <a:extLst>
+              <a:ext uri="{FF2B5EF4-FFF2-40B4-BE49-F238E27FC236}">
+                <a16:creationId xmlns:a16="http://schemas.microsoft.com/office/drawing/2014/main" id="{9C7F204E-B9EC-E9EF-650E-A9AEC6C2BEAE}"/>
+              </a:ext>
+            </a:extLst>
+          </p:cNvPr>
+          <p:cNvSpPr txBox="1"/>
+          <p:nvPr/>
+        </p:nvSpPr>
+        <p:spPr>
+          <a:xfrm>
+            <a:off x="168442" y="5444311"/>
+            <a:ext cx="8807115" cy="923330"/>
+          </a:xfrm>
+          <a:prstGeom prst="rect">
+            <a:avLst/>
+          </a:prstGeom>
+          <a:noFill/>
+        </p:spPr>
+        <p:txBody>
+          <a:bodyPr wrap="square" rtlCol="0">
+            <a:spAutoFit/>
+          </a:bodyPr>
+          <a:lstStyle/>
+          <a:p>
+            <a:pPr algn="ctr"/>
+            <a:r>
+              <a:rPr lang="en-US" dirty="0">
+                <a:solidFill>
+                  <a:schemeClr val="bg1"/>
+                </a:solidFill>
+              </a:rPr>
+              <a:t>Words &amp; Music by Written by John Newton (1772)</a:t>
+            </a:r>
+          </a:p>
+          <a:p>
+            <a:pPr algn="ctr"/>
+            <a:r>
+              <a:rPr lang="en-US" dirty="0">
+                <a:solidFill>
+                  <a:schemeClr val="bg1"/>
+                </a:solidFill>
+              </a:rPr>
+              <a:t>Public Domain</a:t>
+            </a:r>
+          </a:p>
+          <a:p>
+            <a:pPr algn="ctr"/>
+            <a:r>
+              <a:rPr lang="en-US" dirty="0">
+                <a:solidFill>
+                  <a:schemeClr val="bg1"/>
+                </a:solidFill>
+              </a:rPr>
+              <a:t>CCLI License #137776</a:t>
+            </a:r>
+          </a:p>
+        </p:txBody>
+      </p:sp>
     </p:spTree>
     <p:extLst>
       <p:ext uri="{BB962C8B-B14F-4D97-AF65-F5344CB8AC3E}">
@@ -3109,7 +3171,7 @@
           </a:bodyPr>
           <a:lstStyle/>
           <a:p>
-            <a:endParaRPr lang="en-US" sz="4400" dirty="0">
+            <a:endParaRPr lang="en-US" sz="5400" dirty="0">
               <a:solidFill>
                 <a:schemeClr val="bg1"/>
               </a:solidFill>
@@ -3118,7 +3180,7 @@
             </a:endParaRPr>
           </a:p>
           <a:p>
-            <a:endParaRPr lang="en-US" sz="4400" dirty="0">
+            <a:endParaRPr lang="en-US" sz="5400" dirty="0">
               <a:solidFill>
                 <a:schemeClr val="bg1"/>
               </a:solidFill>
@@ -3128,7 +3190,7 @@
           </a:p>
           <a:p>
             <a:r>
-              <a:rPr lang="en-US" sz="4400" dirty="0">
+              <a:rPr lang="en-US" sz="5400" dirty="0">
                 <a:solidFill>
                   <a:schemeClr val="bg1"/>
                 </a:solidFill>
@@ -3140,7 +3202,7 @@
           </a:p>
           <a:p>
             <a:r>
-              <a:rPr lang="en-US" sz="4400" dirty="0">
+              <a:rPr lang="en-US" sz="5400" dirty="0">
                 <a:solidFill>
                   <a:schemeClr val="bg1"/>
                 </a:solidFill>
@@ -3152,7 +3214,7 @@
           </a:p>
           <a:p>
             <a:r>
-              <a:rPr lang="en-US" sz="4400" dirty="0">
+              <a:rPr lang="en-US" sz="5400" dirty="0">
                 <a:solidFill>
                   <a:schemeClr val="bg1"/>
                 </a:solidFill>
@@ -3163,7 +3225,7 @@
             </a:r>
           </a:p>
           <a:p>
-            <a:endParaRPr lang="en-US" sz="4400" dirty="0">
+            <a:endParaRPr lang="en-US" sz="5400" dirty="0">
               <a:solidFill>
                 <a:schemeClr val="bg1"/>
               </a:solidFill>
@@ -3172,7 +3234,7 @@
             </a:endParaRPr>
           </a:p>
           <a:p>
-            <a:endParaRPr lang="en-US" sz="4400" dirty="0">
+            <a:endParaRPr lang="en-US" sz="5400" dirty="0">
               <a:solidFill>
                 <a:schemeClr val="bg1"/>
               </a:solidFill>
@@ -3254,7 +3316,7 @@
           </a:bodyPr>
           <a:lstStyle/>
           <a:p>
-            <a:endParaRPr lang="en-US" sz="4400" dirty="0">
+            <a:endParaRPr lang="en-US" sz="5400" dirty="0">
               <a:solidFill>
                 <a:schemeClr val="bg1"/>
               </a:solidFill>
@@ -3263,7 +3325,7 @@
             </a:endParaRPr>
           </a:p>
           <a:p>
-            <a:endParaRPr lang="en-US" sz="4400" dirty="0">
+            <a:endParaRPr lang="en-US" sz="5400" dirty="0">
               <a:solidFill>
                 <a:schemeClr val="bg1"/>
               </a:solidFill>
@@ -3273,19 +3335,31 @@
           </a:p>
           <a:p>
             <a:r>
-              <a:rPr lang="en-US" sz="4400" dirty="0">
+              <a:rPr lang="en-US" sz="5400" dirty="0">
                 <a:solidFill>
                   <a:schemeClr val="bg1"/>
                 </a:solidFill>
                 <a:latin typeface="Avenir Medium" panose="02000503020000020003" pitchFamily="2" charset="0"/>
                 <a:ea typeface="Bodoni Ornaments" pitchFamily="2" charset="0"/>
               </a:rPr>
-              <a:t>I once was lost but now am found</a:t>
-            </a:r>
-          </a:p>
-          <a:p>
-            <a:r>
-              <a:rPr lang="en-US" sz="4400" dirty="0">
+              <a:t>I once was lost but </a:t>
+            </a:r>
+          </a:p>
+          <a:p>
+            <a:r>
+              <a:rPr lang="en-US" sz="5400" dirty="0">
+                <a:solidFill>
+                  <a:schemeClr val="bg1"/>
+                </a:solidFill>
+                <a:latin typeface="Avenir Medium" panose="02000503020000020003" pitchFamily="2" charset="0"/>
+                <a:ea typeface="Bodoni Ornaments" pitchFamily="2" charset="0"/>
+              </a:rPr>
+              <a:t>now am found</a:t>
+            </a:r>
+          </a:p>
+          <a:p>
+            <a:r>
+              <a:rPr lang="en-US" sz="5400" dirty="0">
                 <a:solidFill>
                   <a:schemeClr val="bg1"/>
                 </a:solidFill>
@@ -3296,7 +3370,7 @@
             </a:r>
           </a:p>
           <a:p>
-            <a:endParaRPr lang="en-US" sz="4400" dirty="0">
+            <a:endParaRPr lang="en-US" sz="5400" dirty="0">
               <a:solidFill>
                 <a:schemeClr val="bg1"/>
               </a:solidFill>
@@ -3378,7 +3452,7 @@
           </a:bodyPr>
           <a:lstStyle/>
           <a:p>
-            <a:endParaRPr lang="en-US" sz="4400" dirty="0">
+            <a:endParaRPr lang="en-US" sz="5400" dirty="0">
               <a:solidFill>
                 <a:schemeClr val="bg1"/>
               </a:solidFill>
@@ -3387,7 +3461,7 @@
             </a:endParaRPr>
           </a:p>
           <a:p>
-            <a:endParaRPr lang="en-US" sz="4400" dirty="0">
+            <a:endParaRPr lang="en-US" sz="5400" dirty="0">
               <a:solidFill>
                 <a:schemeClr val="bg1"/>
               </a:solidFill>
@@ -3397,7 +3471,7 @@
           </a:p>
           <a:p>
             <a:r>
-              <a:rPr lang="en-US" sz="4400" dirty="0" err="1">
+              <a:rPr lang="en-US" sz="5400" dirty="0" err="1">
                 <a:solidFill>
                   <a:schemeClr val="bg1"/>
                 </a:solidFill>
@@ -3407,7 +3481,7 @@
               <a:t>T'was</a:t>
             </a:r>
             <a:r>
-              <a:rPr lang="en-US" sz="4400" dirty="0">
+              <a:rPr lang="en-US" sz="5400" dirty="0">
                 <a:solidFill>
                   <a:schemeClr val="bg1"/>
                 </a:solidFill>
@@ -3419,7 +3493,7 @@
           </a:p>
           <a:p>
             <a:r>
-              <a:rPr lang="en-US" sz="4400" dirty="0">
+              <a:rPr lang="en-US" sz="5400" dirty="0">
                 <a:solidFill>
                   <a:schemeClr val="bg1"/>
                 </a:solidFill>
@@ -3431,7 +3505,7 @@
           </a:p>
           <a:p>
             <a:r>
-              <a:rPr lang="en-US" sz="4400" dirty="0">
+              <a:rPr lang="en-US" sz="5400" dirty="0">
                 <a:solidFill>
                   <a:schemeClr val="bg1"/>
                 </a:solidFill>
@@ -3442,7 +3516,7 @@
             </a:r>
           </a:p>
           <a:p>
-            <a:endParaRPr lang="en-US" sz="4400" dirty="0">
+            <a:endParaRPr lang="en-US" sz="5400" dirty="0">
               <a:solidFill>
                 <a:schemeClr val="bg1"/>
               </a:solidFill>
@@ -3451,7 +3525,7 @@
             </a:endParaRPr>
           </a:p>
           <a:p>
-            <a:endParaRPr lang="en-US" sz="4400" dirty="0">
+            <a:endParaRPr lang="en-US" sz="5400" dirty="0">
               <a:solidFill>
                 <a:schemeClr val="bg1"/>
               </a:solidFill>
@@ -3533,7 +3607,7 @@
           </a:bodyPr>
           <a:lstStyle/>
           <a:p>
-            <a:endParaRPr lang="en-US" sz="4400" dirty="0">
+            <a:endParaRPr lang="en-US" sz="5400" dirty="0">
               <a:solidFill>
                 <a:schemeClr val="bg1"/>
               </a:solidFill>
@@ -3543,7 +3617,7 @@
           </a:p>
           <a:p>
             <a:r>
-              <a:rPr lang="en-US" sz="4400" dirty="0">
+              <a:rPr lang="en-US" sz="5400" dirty="0">
                 <a:solidFill>
                   <a:schemeClr val="bg1"/>
                 </a:solidFill>
@@ -3555,7 +3629,7 @@
           </a:p>
           <a:p>
             <a:r>
-              <a:rPr lang="en-US" sz="4400" dirty="0">
+              <a:rPr lang="en-US" sz="5400" dirty="0">
                 <a:solidFill>
                   <a:schemeClr val="bg1"/>
                 </a:solidFill>
@@ -3566,7 +3640,7 @@
             </a:r>
           </a:p>
           <a:p>
-            <a:endParaRPr lang="en-US" sz="4400" dirty="0">
+            <a:endParaRPr lang="en-US" sz="5400" dirty="0">
               <a:solidFill>
                 <a:schemeClr val="bg1"/>
               </a:solidFill>
@@ -3648,7 +3722,7 @@
           </a:bodyPr>
           <a:lstStyle/>
           <a:p>
-            <a:endParaRPr lang="en-US" sz="4400" dirty="0">
+            <a:endParaRPr lang="en-US" sz="5400" dirty="0">
               <a:solidFill>
                 <a:schemeClr val="bg1"/>
               </a:solidFill>
@@ -3657,7 +3731,7 @@
             </a:endParaRPr>
           </a:p>
           <a:p>
-            <a:endParaRPr lang="en-US" sz="4400" dirty="0">
+            <a:endParaRPr lang="en-US" sz="5400" dirty="0">
               <a:solidFill>
                 <a:schemeClr val="bg1"/>
               </a:solidFill>
@@ -3667,7 +3741,7 @@
           </a:p>
           <a:p>
             <a:r>
-              <a:rPr lang="en-US" sz="4400" dirty="0">
+              <a:rPr lang="en-US" sz="5400" dirty="0">
                 <a:solidFill>
                   <a:schemeClr val="bg1"/>
                 </a:solidFill>
@@ -3679,7 +3753,7 @@
           </a:p>
           <a:p>
             <a:r>
-              <a:rPr lang="en-US" sz="4400" dirty="0">
+              <a:rPr lang="en-US" sz="5400" dirty="0">
                 <a:solidFill>
                   <a:schemeClr val="bg1"/>
                 </a:solidFill>
@@ -3691,7 +3765,7 @@
           </a:p>
           <a:p>
             <a:r>
-              <a:rPr lang="en-US" sz="4400" dirty="0">
+              <a:rPr lang="en-US" sz="5400" dirty="0">
                 <a:solidFill>
                   <a:schemeClr val="bg1"/>
                 </a:solidFill>
@@ -3702,7 +3776,7 @@
             </a:r>
           </a:p>
           <a:p>
-            <a:endParaRPr lang="en-US" sz="4400" dirty="0">
+            <a:endParaRPr lang="en-US" sz="5400" dirty="0">
               <a:solidFill>
                 <a:schemeClr val="bg1"/>
               </a:solidFill>
@@ -3784,7 +3858,7 @@
           </a:bodyPr>
           <a:lstStyle/>
           <a:p>
-            <a:endParaRPr lang="en-US" sz="4400" dirty="0">
+            <a:endParaRPr lang="en-US" sz="5400" dirty="0">
               <a:solidFill>
                 <a:schemeClr val="bg1"/>
               </a:solidFill>
@@ -3794,7 +3868,7 @@
           </a:p>
           <a:p>
             <a:r>
-              <a:rPr lang="en-US" sz="4400" dirty="0">
+              <a:rPr lang="en-US" sz="5400" dirty="0">
                 <a:solidFill>
                   <a:schemeClr val="bg1"/>
                 </a:solidFill>
@@ -3806,7 +3880,7 @@
           </a:p>
           <a:p>
             <a:r>
-              <a:rPr lang="en-US" sz="4400" dirty="0">
+              <a:rPr lang="en-US" sz="5400" dirty="0">
                 <a:solidFill>
                   <a:schemeClr val="bg1"/>
                 </a:solidFill>
@@ -3818,7 +3892,7 @@
           </a:p>
           <a:p>
             <a:r>
-              <a:rPr lang="en-US" sz="4400" dirty="0">
+              <a:rPr lang="en-US" sz="5400" dirty="0">
                 <a:solidFill>
                   <a:schemeClr val="bg1"/>
                 </a:solidFill>
@@ -3829,7 +3903,7 @@
             </a:r>
           </a:p>
           <a:p>
-            <a:endParaRPr lang="en-US" sz="4400" dirty="0">
+            <a:endParaRPr lang="en-US" sz="5400" dirty="0">
               <a:solidFill>
                 <a:schemeClr val="bg1"/>
               </a:solidFill>
@@ -3911,7 +3985,7 @@
           </a:bodyPr>
           <a:lstStyle/>
           <a:p>
-            <a:endParaRPr lang="en-US" sz="4400" dirty="0">
+            <a:endParaRPr lang="en-US" sz="5400" dirty="0">
               <a:solidFill>
                 <a:schemeClr val="bg1"/>
               </a:solidFill>
@@ -3920,7 +3994,7 @@
             </a:endParaRPr>
           </a:p>
           <a:p>
-            <a:endParaRPr lang="en-US" sz="4400" dirty="0">
+            <a:endParaRPr lang="en-US" sz="5400" dirty="0">
               <a:solidFill>
                 <a:schemeClr val="bg1"/>
               </a:solidFill>
@@ -3930,7 +4004,7 @@
           </a:p>
           <a:p>
             <a:r>
-              <a:rPr lang="en-US" sz="4400" dirty="0">
+              <a:rPr lang="en-US" sz="5400" dirty="0">
                 <a:solidFill>
                   <a:schemeClr val="bg1"/>
                 </a:solidFill>
@@ -3942,7 +4016,7 @@
           </a:p>
           <a:p>
             <a:r>
-              <a:rPr lang="en-US" sz="4400" dirty="0">
+              <a:rPr lang="en-US" sz="5400" dirty="0">
                 <a:solidFill>
                   <a:schemeClr val="bg1"/>
                 </a:solidFill>
@@ -3954,7 +4028,7 @@
           </a:p>
           <a:p>
             <a:r>
-              <a:rPr lang="en-US" sz="4400" dirty="0">
+              <a:rPr lang="en-US" sz="5400" dirty="0">
                 <a:solidFill>
                   <a:schemeClr val="bg1"/>
                 </a:solidFill>
@@ -3965,7 +4039,7 @@
             </a:r>
           </a:p>
           <a:p>
-            <a:endParaRPr lang="en-US" sz="4400" dirty="0">
+            <a:endParaRPr lang="en-US" sz="5400" dirty="0">
               <a:solidFill>
                 <a:schemeClr val="bg1"/>
               </a:solidFill>
@@ -4047,7 +4121,7 @@
           </a:bodyPr>
           <a:lstStyle/>
           <a:p>
-            <a:endParaRPr lang="en-US" sz="4400" dirty="0">
+            <a:endParaRPr lang="en-US" sz="5400" dirty="0">
               <a:solidFill>
                 <a:schemeClr val="bg1"/>
               </a:solidFill>
@@ -4057,7 +4131,7 @@
           </a:p>
           <a:p>
             <a:r>
-              <a:rPr lang="en-US" sz="4400" dirty="0">
+              <a:rPr lang="en-US" sz="5400" dirty="0">
                 <a:solidFill>
                   <a:schemeClr val="bg1"/>
                 </a:solidFill>
@@ -4069,7 +4143,7 @@
           </a:p>
           <a:p>
             <a:r>
-              <a:rPr lang="en-US" sz="4400" dirty="0">
+              <a:rPr lang="en-US" sz="5400" dirty="0">
                 <a:solidFill>
                   <a:schemeClr val="bg1"/>
                 </a:solidFill>
@@ -4080,7 +4154,7 @@
             </a:r>
           </a:p>
           <a:p>
-            <a:endParaRPr lang="en-US" sz="4400" dirty="0">
+            <a:endParaRPr lang="en-US" sz="5400" dirty="0">
               <a:solidFill>
                 <a:schemeClr val="bg1"/>
               </a:solidFill>

--- a/Amazing Grace.pptx
+++ b/Amazing Grace.pptx
@@ -251,7 +251,7 @@
           <a:p>
             <a:fld id="{E759A0DE-F190-5444-87AC-4719D5F20D15}" type="datetimeFigureOut">
               <a:rPr lang="en-US" smtClean="0"/>
-              <a:t>8/1/26</a:t>
+              <a:t>8/15/26</a:t>
             </a:fld>
             <a:endParaRPr lang="en-US"/>
           </a:p>
@@ -421,7 +421,7 @@
           <a:p>
             <a:fld id="{E759A0DE-F190-5444-87AC-4719D5F20D15}" type="datetimeFigureOut">
               <a:rPr lang="en-US" smtClean="0"/>
-              <a:t>8/1/26</a:t>
+              <a:t>8/15/26</a:t>
             </a:fld>
             <a:endParaRPr lang="en-US"/>
           </a:p>
@@ -601,7 +601,7 @@
           <a:p>
             <a:fld id="{E759A0DE-F190-5444-87AC-4719D5F20D15}" type="datetimeFigureOut">
               <a:rPr lang="en-US" smtClean="0"/>
-              <a:t>8/1/26</a:t>
+              <a:t>8/15/26</a:t>
             </a:fld>
             <a:endParaRPr lang="en-US"/>
           </a:p>
@@ -771,7 +771,7 @@
           <a:p>
             <a:fld id="{E759A0DE-F190-5444-87AC-4719D5F20D15}" type="datetimeFigureOut">
               <a:rPr lang="en-US" smtClean="0"/>
-              <a:t>8/1/26</a:t>
+              <a:t>8/15/26</a:t>
             </a:fld>
             <a:endParaRPr lang="en-US"/>
           </a:p>
@@ -1017,7 +1017,7 @@
           <a:p>
             <a:fld id="{E759A0DE-F190-5444-87AC-4719D5F20D15}" type="datetimeFigureOut">
               <a:rPr lang="en-US" smtClean="0"/>
-              <a:t>8/1/26</a:t>
+              <a:t>8/15/26</a:t>
             </a:fld>
             <a:endParaRPr lang="en-US"/>
           </a:p>
@@ -1249,7 +1249,7 @@
           <a:p>
             <a:fld id="{E759A0DE-F190-5444-87AC-4719D5F20D15}" type="datetimeFigureOut">
               <a:rPr lang="en-US" smtClean="0"/>
-              <a:t>8/1/26</a:t>
+              <a:t>8/15/26</a:t>
             </a:fld>
             <a:endParaRPr lang="en-US"/>
           </a:p>
@@ -1616,7 +1616,7 @@
           <a:p>
             <a:fld id="{E759A0DE-F190-5444-87AC-4719D5F20D15}" type="datetimeFigureOut">
               <a:rPr lang="en-US" smtClean="0"/>
-              <a:t>8/1/26</a:t>
+              <a:t>8/15/26</a:t>
             </a:fld>
             <a:endParaRPr lang="en-US"/>
           </a:p>
@@ -1734,7 +1734,7 @@
           <a:p>
             <a:fld id="{E759A0DE-F190-5444-87AC-4719D5F20D15}" type="datetimeFigureOut">
               <a:rPr lang="en-US" smtClean="0"/>
-              <a:t>8/1/26</a:t>
+              <a:t>8/15/26</a:t>
             </a:fld>
             <a:endParaRPr lang="en-US"/>
           </a:p>
@@ -1829,7 +1829,7 @@
           <a:p>
             <a:fld id="{E759A0DE-F190-5444-87AC-4719D5F20D15}" type="datetimeFigureOut">
               <a:rPr lang="en-US" smtClean="0"/>
-              <a:t>8/1/26</a:t>
+              <a:t>8/15/26</a:t>
             </a:fld>
             <a:endParaRPr lang="en-US"/>
           </a:p>
@@ -2106,7 +2106,7 @@
           <a:p>
             <a:fld id="{E759A0DE-F190-5444-87AC-4719D5F20D15}" type="datetimeFigureOut">
               <a:rPr lang="en-US" smtClean="0"/>
-              <a:t>8/1/26</a:t>
+              <a:t>8/15/26</a:t>
             </a:fld>
             <a:endParaRPr lang="en-US"/>
           </a:p>
@@ -2363,7 +2363,7 @@
           <a:p>
             <a:fld id="{E759A0DE-F190-5444-87AC-4719D5F20D15}" type="datetimeFigureOut">
               <a:rPr lang="en-US" smtClean="0"/>
-              <a:t>8/1/26</a:t>
+              <a:t>8/15/26</a:t>
             </a:fld>
             <a:endParaRPr lang="en-US"/>
           </a:p>
@@ -2576,7 +2576,7 @@
           <a:p>
             <a:fld id="{E759A0DE-F190-5444-87AC-4719D5F20D15}" type="datetimeFigureOut">
               <a:rPr lang="en-US" smtClean="0"/>
-              <a:t>8/1/26</a:t>
+              <a:t>8/15/26</a:t>
             </a:fld>
             <a:endParaRPr lang="en-US"/>
           </a:p>
@@ -3072,7 +3072,23 @@
                   <a:schemeClr val="bg1"/>
                 </a:solidFill>
               </a:rPr>
-              <a:t>Words &amp; Music by Written by John Newton (1772)</a:t>
+              <a:t>Words &amp; Music </a:t>
+            </a:r>
+            <a:r>
+              <a:rPr lang="en-US">
+                <a:solidFill>
+                  <a:schemeClr val="bg1"/>
+                </a:solidFill>
+              </a:rPr>
+              <a:t>by John </a:t>
+            </a:r>
+            <a:r>
+              <a:rPr lang="en-US" dirty="0">
+                <a:solidFill>
+                  <a:schemeClr val="bg1"/>
+                </a:solidFill>
+              </a:rPr>
+              <a:t>Newton (1772)</a:t>
             </a:r>
           </a:p>
           <a:p>
